--- a/SIH2026-DeltaForce-SIH1733-IDEA-SUBMISSION.pptx
+++ b/SIH2026-DeltaForce-SIH1733-IDEA-SUBMISSION.pptx
@@ -5962,7 +5962,7 @@
             </a:pPr>
             <a:r>
               <a:rPr sz="1800" b="0"/>
-              <a:t>•  Radar carries no colour — so every pixel also ships a CALIBRATED CONFIDENCE. Below your threshold the output goes grey: “insufficient evidence”, not a confident guess.</a:t>
+              <a:t>•  USP — radar carries no colour, so every pixel ships a CALIBRATED CONFIDENCE. Below your threshold the output goes grey: “insufficient evidence”, not a confident guess.</a:t>
             </a:r>
           </a:p>
           <a:p>
@@ -5986,7 +5986,7 @@
             </a:pPr>
             <a:r>
               <a:rPr sz="1800" b="0"/>
-              <a:t>•  Innovation 1 — we diagnosed why existing models look unsatisfactory. L1 loss is minimised by the conditional MEAN of every plausible colour, which is blur by definition, and PSNR rewards the same thing so standard evaluation cannot see it. A gradient-difference loss fixed it: sharpness 0.21 → 0.78 of the real optical, saturation 45% → 102%.</a:t>
+              <a:t>•  Unique 1 — we diagnosed WHY existing models look unsatisfactory. L1 loss is minimised by the conditional MEAN of every plausible colour, which is blur by definition, and PSNR rewards the same thing so standard evaluation cannot see it. A gradient-difference loss fixed it: sharpness 0.21 → 0.78 of the real optical, saturation 45% → 102%.</a:t>
             </a:r>
           </a:p>
           <a:p>
@@ -5998,7 +5998,7 @@
             </a:pPr>
             <a:r>
               <a:rPr sz="1800" b="0"/>
-              <a:t>•  Innovation 2 — we measure what does not work and refuse to ship it. Built-up land cover from radar alone scores AUC 0.483, below chance, so the app reports it as unavailable and says why.</a:t>
+              <a:t>•  Unique 2 — we measure what does not work and REFUSE to ship it. Built-up land cover from radar alone scores AUC 0.483, below chance, so the app reports it as unavailable and says why.</a:t>
             </a:r>
           </a:p>
         </p:txBody>

--- a/SIH2026-DeltaForce-SIH1733-IDEA-SUBMISSION.pptx
+++ b/SIH2026-DeltaForce-SIH1733-IDEA-SUBMISSION.pptx
@@ -5703,18 +5703,6 @@
             </a:pPr>
             <a:r>
               <a:rPr sz="1400" b="0"/>
-              <a:t>Team ID – &lt;FILL BEFORE UPLOAD&gt;</a:t>
-            </a:r>
-          </a:p>
-          <a:p>
-            <a:pPr marL="0" indent="0">
-              <a:spcAft>
-                <a:spcPts val="600"/>
-              </a:spcAft>
-              <a:buNone/>
-            </a:pPr>
-            <a:r>
-              <a:rPr sz="1400" b="0"/>
               <a:t>Team Name – Delta Force</a:t>
             </a:r>
           </a:p>

--- a/SIH2026-DeltaForce-SIH1733-IDEA-SUBMISSION.pptx
+++ b/SIH2026-DeltaForce-SIH1733-IDEA-SUBMISSION.pptx
@@ -5906,7 +5906,7 @@
               <a:buNone/>
             </a:pPr>
             <a:r>
-              <a:rPr sz="2050" b="1"/>
+              <a:rPr sz="1950" b="1"/>
               <a:t>ChromaSAR — colorized SAR you can act on, with a confidence you can check</a:t>
             </a:r>
             <a:endParaRPr lang="en-US" sz="3200" u="sng" dirty="0">
@@ -5925,7 +5925,7 @@
               <a:buNone/>
             </a:pPr>
             <a:r>
-              <a:rPr sz="1800" b="0"/>
+              <a:rPr sz="1700" b="0"/>
               <a:t>•  Problem: optical satellites go blind under cloud — exactly during the monsoon. Radar sees through it, but radar is grayscale texture only specialists can read.</a:t>
             </a:r>
           </a:p>
@@ -5937,7 +5937,7 @@
               <a:buNone/>
             </a:pPr>
             <a:r>
-              <a:rPr sz="1800" b="0"/>
+              <a:rPr sz="1700" b="0"/>
               <a:t>•  Solution: a conditional GAN colorizes Sentinel-1 SAR into optical-like imagery, trained on 10,000 co-registered SAR–optical pairs.</a:t>
             </a:r>
           </a:p>
@@ -5949,8 +5949,8 @@
               <a:buNone/>
             </a:pPr>
             <a:r>
-              <a:rPr sz="1800" b="0"/>
-              <a:t>•  USP — radar carries no colour, so every pixel ships a CALIBRATED CONFIDENCE. Below your threshold the output goes grey: “insufficient evidence”, not a confident guess.</a:t>
+              <a:rPr sz="1700" b="0"/>
+              <a:t>•  USP — radar carries no colour, so every pixel ships a CALIBRATED CONFIDENCE. Below your threshold the output goes grey: “insufficient evidence”, not a confident guess. Per-pixel uncertainty on SAR is not new; what is new is that ours is calibrated, shown to the user, and GATES the downstream answer.</a:t>
             </a:r>
           </a:p>
           <a:p>
@@ -5961,7 +5961,7 @@
               <a:buNone/>
             </a:pPr>
             <a:r>
-              <a:rPr sz="1800" b="0"/>
+              <a:rPr sz="1700" b="0"/>
               <a:t>•  That confidence GATES everything downstream — flood extent, change detection and surface cover are all filtered by it.</a:t>
             </a:r>
           </a:p>
@@ -5973,7 +5973,7 @@
               <a:buNone/>
             </a:pPr>
             <a:r>
-              <a:rPr sz="1800" b="0"/>
+              <a:rPr sz="1700" b="0"/>
               <a:t>•  Unique 1 — we diagnosed WHY existing models look unsatisfactory. L1 loss is minimised by the conditional MEAN of every plausible colour, which is blur by definition, and PSNR rewards the same thing so standard evaluation cannot see it. A gradient-difference loss fixed it: sharpness 0.21 → 0.78 of the real optical, saturation 45% → 102%.</a:t>
             </a:r>
           </a:p>
@@ -5985,7 +5985,7 @@
               <a:buNone/>
             </a:pPr>
             <a:r>
-              <a:rPr sz="1800" b="0"/>
+              <a:rPr sz="1700" b="0"/>
               <a:t>•  Unique 2 — we measure what does not work and REFUSE to ship it. Built-up land cover from radar alone scores AUC 0.483, below chance, so the app reports it as unavailable and says why.</a:t>
             </a:r>
           </a:p>
@@ -6766,7 +6766,7 @@
               <a:buNone/>
             </a:pPr>
             <a:r>
-              <a:rPr sz="1850" b="1"/>
+              <a:rPr sz="1650" b="1"/>
               <a:t>Feasibility — demonstrated, not projected</a:t>
             </a:r>
             <a:endParaRPr kumimoji="0" lang="en-US" sz="2800" b="0" i="0" u="none" strike="noStrike" kern="1200" cap="none" spc="0" normalizeH="0" baseline="0" noProof="0" dirty="0">
@@ -6792,7 +6792,7 @@
               <a:buNone/>
             </a:pPr>
             <a:r>
-              <a:rPr sz="1600" b="0"/>
+              <a:rPr sz="1400" b="0"/>
               <a:t>•  Runs today on a laptop CPU. No GPU, no cloud dependency, no API key.</a:t>
             </a:r>
           </a:p>
@@ -6804,7 +6804,7 @@
               <a:buNone/>
             </a:pPr>
             <a:r>
-              <a:rPr sz="1600" b="0"/>
+              <a:rPr sz="1400" b="0"/>
               <a:t>•  Flood mapping IoU 0.681 on the Sen1Floods11 OFFICIAL test split, against 0.550 for the physics baseline. Probabilities calibrated: ECE 0.029 → 0.016.</a:t>
             </a:r>
           </a:p>
@@ -6816,8 +6816,20 @@
               <a:buNone/>
             </a:pPr>
             <a:r>
-              <a:rPr sz="1600" b="0"/>
+              <a:rPr sz="1400" b="0"/>
               <a:t>•  An uploaded file scores identically to our benchmark — 0.00% difference across three scenes on three continents.</a:t>
+            </a:r>
+          </a:p>
+          <a:p>
+            <a:pPr marL="0" indent="0">
+              <a:spcAft>
+                <a:spcPts val="400"/>
+              </a:spcAft>
+              <a:buNone/>
+            </a:pPr>
+            <a:r>
+              <a:rPr sz="1400" b="0"/>
+              <a:t>•  Honest positioning: 0.681 beats the Sen1Floods11 published baseline (0.662) and matches a supervised SAR-only model (0.676). SAR-only state of the art is ~0.72 (DeepSARFlood, IIT Delhi). We are competitive, not leading, and we say so.</a:t>
             </a:r>
           </a:p>
           <a:p>
@@ -6828,7 +6840,7 @@
               <a:buNone/>
             </a:pPr>
             <a:r>
-              <a:rPr sz="1850" b="1"/>
+              <a:rPr sz="1650" b="1"/>
               <a:t>Risks, and how we handle them</a:t>
             </a:r>
           </a:p>
@@ -6840,7 +6852,7 @@
               <a:buNone/>
             </a:pPr>
             <a:r>
-              <a:rPr sz="1600" b="0"/>
+              <a:rPr sz="1400" b="0"/>
               <a:t>•  Hallucination — the network invents colour the radar never carried. → Ship the confidence map and refuse below threshold. Surfaced, never hidden.</a:t>
             </a:r>
           </a:p>
@@ -6852,7 +6864,7 @@
               <a:buNone/>
             </a:pPr>
             <a:r>
-              <a:rPr sz="1600" b="0"/>
+              <a:rPr sz="1400" b="0"/>
               <a:t>•  Blur — L1 drives the output to the conditional mean. → Gradient-difference loss, plus a sharpness metric PSNR is structurally blind to.</a:t>
             </a:r>
           </a:p>
@@ -6864,7 +6876,7 @@
               <a:buNone/>
             </a:pPr>
             <a:r>
-              <a:rPr sz="1600" b="0"/>
+              <a:rPr sz="1400" b="0"/>
               <a:t>•  Flooded vegetation double-bounces and returns BRIGHT, not dark, so the physics threshold misses it. → Learned segmentation replaces physics where physics fails.</a:t>
             </a:r>
           </a:p>
@@ -6876,7 +6888,7 @@
               <a:buNone/>
             </a:pPr>
             <a:r>
-              <a:rPr sz="1600" b="0"/>
+              <a:rPr sz="1400" b="0"/>
               <a:t>•  Land cover from radar alone does not work (built-up AUC 0.483). → Measured, and refused. Cover is read from the co-registered Sentinel-2 optical and labelled as such.</a:t>
             </a:r>
           </a:p>
@@ -6888,7 +6900,7 @@
               <a:buNone/>
             </a:pPr>
             <a:r>
-              <a:rPr sz="1600" b="0"/>
+              <a:rPr sz="1400" b="0"/>
               <a:t>•  Domain shift across terrain. → Stratified sampling over agro-climatic zones, per-region fine-tuning.</a:t>
             </a:r>
           </a:p>
@@ -7834,7 +7846,7 @@
               <a:buNone/>
             </a:pPr>
             <a:r>
-              <a:rPr sz="1850" b="1"/>
+              <a:rPr sz="1450" b="1"/>
               <a:t>Datasets</a:t>
             </a:r>
             <a:endParaRPr kumimoji="0" lang="en-US" sz="2800" b="0" i="0" u="none" strike="noStrike" kern="1200" cap="none" spc="0" normalizeH="0" baseline="0" noProof="0" dirty="0">
@@ -7860,7 +7872,7 @@
               <a:buNone/>
             </a:pPr>
             <a:r>
-              <a:rPr sz="1600" b="0"/>
+              <a:rPr sz="1200" b="0"/>
               <a:t>•  Sen1Floods11 — Bonafilia et al., CVPRW 2020. 446 hand-labelled flood chips, 11 regions, official split.  github.com/cloudtostreet/Sen1Floods11</a:t>
             </a:r>
           </a:p>
@@ -7872,7 +7884,7 @@
               <a:buNone/>
             </a:pPr>
             <a:r>
-              <a:rPr sz="1600" b="0"/>
+              <a:rPr sz="1200" b="0"/>
               <a:t>•  SEN1-2 — Schmitt et al., ISPRS 2018. 10,000 co-registered SAR–optical pairs; the paper names SAR colorization as an intended use.  mediatum.ub.tum.de/1436631</a:t>
             </a:r>
           </a:p>
@@ -7884,7 +7896,7 @@
               <a:buNone/>
             </a:pPr>
             <a:r>
-              <a:rPr sz="1600" b="0"/>
+              <a:rPr sz="1200" b="0"/>
               <a:t>•  Imagery — Sentinel-1 / Sentinel-2 via ESA Copernicus.  dataspace.copernicus.eu</a:t>
             </a:r>
           </a:p>
@@ -7896,8 +7908,8 @@
               <a:buNone/>
             </a:pPr>
             <a:r>
-              <a:rPr sz="1850" b="1"/>
-              <a:t>Methods</a:t>
+              <a:rPr sz="1450" b="1"/>
+              <a:t>Prior art and incumbents</a:t>
             </a:r>
           </a:p>
           <a:p>
@@ -7908,8 +7920,8 @@
               <a:buNone/>
             </a:pPr>
             <a:r>
-              <a:rPr sz="1600" b="0"/>
-              <a:t>•  Isola et al., Image-to-Image Translation with Conditional Adversarial Networks (pix2pix), CVPR 2017 — our deliberate baseline.</a:t>
+              <a:rPr sz="1200" b="0"/>
+              <a:t>•  Copernicus GFM — operational global flood service. Already ships a per-pixel likelihood, but on a binary mask, with no colorization.  extwiki.eodc.eu/gfm</a:t>
             </a:r>
           </a:p>
           <a:p>
@@ -7920,8 +7932,8 @@
               <a:buNone/>
             </a:pPr>
             <a:r>
-              <a:rPr sz="1600" b="0"/>
-              <a:t>•  Mathieu et al., Deep Multi-Scale Video Prediction Beyond MSE, ICLR 2016 — the gradient-difference loss that removed our blur.</a:t>
+              <a:rPr sz="1200" b="0"/>
+              <a:t>•  ISRO NRSC — near-real-time flood inundation via NDEM / Bhuvan (EOS-04, Sentinel-1). Authoritative, event-triggered, delivered as maps.  nrsc.gov.in</a:t>
             </a:r>
           </a:p>
           <a:p>
@@ -7932,8 +7944,20 @@
               <a:buNone/>
             </a:pPr>
             <a:r>
-              <a:rPr sz="1600" b="0"/>
-              <a:t>•  Gal &amp; Ghahramani, Dropout as a Bayesian Approximation, ICML 2016 — the basis of our per-pixel confidence.</a:t>
+              <a:rPr sz="1200" b="0"/>
+              <a:t>•  OSCAR, 2026 — uncertainty-aware SAR-to-optical diffusion. Closest prior art; the uncertainty stays in the training loss.  arxiv.org/abs/2601.06835</a:t>
+            </a:r>
+          </a:p>
+          <a:p>
+            <a:pPr marL="0" indent="0">
+              <a:spcAft>
+                <a:spcPts val="700"/>
+              </a:spcAft>
+              <a:buNone/>
+            </a:pPr>
+            <a:r>
+              <a:rPr sz="1450" b="1"/>
+              <a:t>Methods</a:t>
             </a:r>
           </a:p>
           <a:p>
@@ -7944,8 +7968,8 @@
               <a:buNone/>
             </a:pPr>
             <a:r>
-              <a:rPr sz="1600" b="0"/>
-              <a:t>•  Guo et al., On Calibration of Modern Neural Networks, ICML 2017 — temperature scaling; ECE 0.029 → 0.016.</a:t>
+              <a:rPr sz="1200" b="0"/>
+              <a:t>•  Isola et al., Image-to-Image Translation with Conditional Adversarial Networks (pix2pix), CVPR 2017 — our deliberate baseline.</a:t>
             </a:r>
           </a:p>
           <a:p>
@@ -7956,7 +7980,43 @@
               <a:buNone/>
             </a:pPr>
             <a:r>
-              <a:rPr sz="1600" b="0"/>
+              <a:rPr sz="1200" b="0"/>
+              <a:t>•  Mathieu et al., Deep Multi-Scale Video Prediction Beyond MSE, ICLR 2016 — the gradient-difference loss that removed our blur.</a:t>
+            </a:r>
+          </a:p>
+          <a:p>
+            <a:pPr marL="0" indent="0">
+              <a:spcAft>
+                <a:spcPts val="400"/>
+              </a:spcAft>
+              <a:buNone/>
+            </a:pPr>
+            <a:r>
+              <a:rPr sz="1200" b="0"/>
+              <a:t>•  Gal &amp; Ghahramani, Dropout as a Bayesian Approximation, ICML 2016 — the basis of our per-pixel confidence.</a:t>
+            </a:r>
+          </a:p>
+          <a:p>
+            <a:pPr marL="0" indent="0">
+              <a:spcAft>
+                <a:spcPts val="400"/>
+              </a:spcAft>
+              <a:buNone/>
+            </a:pPr>
+            <a:r>
+              <a:rPr sz="1200" b="0"/>
+              <a:t>•  Guo et al., On Calibration of Modern Neural Networks, ICML 2017 — temperature scaling; ECE 0.029 → 0.016.</a:t>
+            </a:r>
+          </a:p>
+          <a:p>
+            <a:pPr marL="0" indent="0">
+              <a:spcAft>
+                <a:spcPts val="400"/>
+              </a:spcAft>
+              <a:buNone/>
+            </a:pPr>
+            <a:r>
+              <a:rPr sz="1200" b="0"/>
               <a:t>•  Xu, Modification of NDWI (MNDWI), IJRS 2006 — optical water reference; we re-measured the threshold rather than adopting it.</a:t>
             </a:r>
           </a:p>

--- a/SIH2026-DeltaForce-SIH1733-IDEA-SUBMISSION.pptx
+++ b/SIH2026-DeltaForce-SIH1733-IDEA-SUBMISSION.pptx
@@ -5703,6 +5703,18 @@
             </a:pPr>
             <a:r>
               <a:rPr sz="1400" b="0"/>
+              <a:t>Team Number – 71</a:t>
+            </a:r>
+          </a:p>
+          <a:p>
+            <a:pPr marL="0" indent="0">
+              <a:spcAft>
+                <a:spcPts val="600"/>
+              </a:spcAft>
+              <a:buNone/>
+            </a:pPr>
+            <a:r>
+              <a:rPr sz="1400" b="0"/>
               <a:t>Team Name – Delta Force</a:t>
             </a:r>
           </a:p>
